--- a/decks/hist-russian-revolution/hist-russian-revolution_ch6_bolshevik-rule.pptx
+++ b/decks/hist-russian-revolution/hist-russian-revolution_ch6_bolshevik-rule.pptx
@@ -132,31 +132,31 @@
   <p:extLst>
     <p:ext uri="{521415D9-36F7-43E2-AB2F-B90AF26B5E84}">
       <p14:sectionLst xmlns:p14="http://schemas.microsoft.com/office/powerpoint/2010/main">
-        <p14:section name="Opening" id="{c62eba58-2aaa-c63a-c245-af914a106f7e}">
+        <p14:section name="Opening" id="{0315eba1-3e74-b05a-79de-f2c3f266c202}">
           <p14:sldIdLst>
             <p14:sldId id="256"/>
           </p14:sldIdLst>
         </p14:section>
-        <p14:section name="Gate" id="{93ef798b-9184-b541-37ef-e88947b6f0b7}">
+        <p14:section name="Gate" id="{fa263b28-1661-b1df-7505-98a965f63643}">
           <p14:sldIdLst>
             <p14:sldId id="257"/>
             <p14:sldId id="258"/>
             <p14:sldId id="259"/>
           </p14:sldIdLst>
         </p14:section>
-        <p14:section name="Pre-teach" id="{dfc2836d-0217-cf3f-58eb-32bad1323f58}">
+        <p14:section name="Pre-teach" id="{c162f683-636d-449a-8c24-31564b05b510}">
           <p14:sldIdLst>
             <p14:sldId id="260"/>
             <p14:sldId id="261"/>
           </p14:sldIdLst>
         </p14:section>
-        <p14:section name="Read-along" id="{bf650eec-9ce8-c6a0-ed82-8f3c10a38376}">
+        <p14:section name="Read-along" id="{9aec4f0a-f8fd-61d1-0479-a4709e3fb20e}">
           <p14:sldIdLst>
             <p14:sldId id="262"/>
             <p14:sldId id="263"/>
           </p14:sldIdLst>
         </p14:section>
-        <p14:section name="Teach" id="{ab8f0d14-8b0e-f5ec-09e0-23282c372038}">
+        <p14:section name="Teach" id="{70626a5b-35dc-4fda-6946-46a9ca2e248c}">
           <p14:sldIdLst>
             <p14:sldId id="264"/>
             <p14:sldId id="265"/>
@@ -166,7 +166,7 @@
             <p14:sldId id="269"/>
           </p14:sldIdLst>
         </p14:section>
-        <p14:section name="Routes" id="{36a0bc5d-ae5b-1fda-0104-fe5c79b23ab3}">
+        <p14:section name="Routes" id="{97a82c48-b72c-6616-c46f-a5d9cf7d218f}">
           <p14:sldIdLst>
             <p14:sldId id="270"/>
             <p14:sldId id="271"/>
@@ -177,12 +177,12 @@
             <p14:sldId id="276"/>
           </p14:sldIdLst>
         </p14:section>
-        <p14:section name="Close" id="{e959109c-b30b-5644-f504-45c7b2d4715f}">
+        <p14:section name="Close" id="{e02b3e59-f0c5-8849-c4bb-28205ac8532b}">
           <p14:sldIdLst>
             <p14:sldId id="277"/>
           </p14:sldIdLst>
         </p14:section>
-        <p14:section name="Answers" id="{61fcf88a-d886-f58d-8c2e-96cac229ba87}">
+        <p14:section name="Answers" id="{76c669f8-30f5-158d-863e-fa6a534477d9}">
           <p14:sldIdLst>
             <p14:sldId id="278"/>
             <p14:sldId id="279"/>
@@ -1900,7 +1900,7 @@
               <a:rPr lang="en-US" dirty="0"/>
               <a:t>Exit ticket — individual, silent, on a slip or mini-whiteboard. Recall before help: no notes, no lanes, no hints. Collect before pupils leave.
 Question: How did Karl Marx describe communism?
-Answer: D   A system in which property is owned by the whole community and wealth is shared fairly. Your lesson gives Marx's definition as a system of social organisation in which all property is owned by the community, with wealth shared out fairly by a workers' government.
+Answer: D   A system in which property is owned by the whole community and wealth is shared fairly. Your lesson defines communism as a way of organising society in which the community owns all the property, and a government of workers shares the wealth out fairly.
 Source of this question: gate item 1 re-asked (options rotated) — this chapter has no third quick-check module.
 The ebook also holds task 3, "How much really changed?", for homework or the next lesson's do now.
 Sort the slips: correct → ready to move on; incorrect → start next lesson in the pre-teach group, with the read-along and the Support lane. Same destination next time.</a:t>
@@ -2270,7 +2270,7 @@
               <a:rPr lang="en-US" dirty="0"/>
               <a:t>Answers — exit ticket: Exit ticket. Reveal the answer; pupils mark their own work in a different colour, then read the "why" together. Same destination for every lane, so one answer serves the whole class.
 Answer: D   A system in which property is owned by the whole community and wealth is shared fairly
-Why: Your lesson gives Marx's definition as a system of social organisation in which all property is owned by the community, with wealth shared out fairly by a workers' government.
+Why: Your lesson defines communism as a way of organising society in which the community owns all the property, and a government of workers shares the wealth out fairly.
 Ask a Support pupil to explain one step, and a Stretch pupil to share their extension.</a:t>
             </a:r>
             <a:endParaRPr lang="en-US" dirty="0"/>
@@ -2452,7 +2452,7 @@
             <a:r>
               <a:rPr lang="en-US" dirty="0"/>
               <a:t>Answers — pupils mark their own in a different colour, then hands up for 3/3, 2/3, 1/3.
-1. A   A system in which property is owned by the whole community and wealth is shared fairly. Your lesson gives Marx's definition as a system of social organisation in which all property is owned by the community, with wealth shared out fairly by a workers' government.
+1. A   A system in which property is owned by the whole community and wealth is shared fairly. Your lesson defines communism as a way of organising society in which the community owns all the property, and a government of workers shares the wealth out fairly.
 2. Soviet. The Soviet Union was created in 1922, named after the soviets, the councils of workers and soldiers.
 3. B   Only the Communist Party was allowed to exist, and only communist newspapers could be published. Banning every other party and every other newspaper removes the two things people need to change a government by argument: choice and information.
 Say the route each score points to: 3/3 Stretch, 2/3 Core, 0–1 Support. Pupils may choose to move up.</a:t>
@@ -15937,7 +15937,7 @@
                 <a:ea typeface="Calibri" pitchFamily="34" charset="-122"/>
                 <a:cs typeface="Calibri" pitchFamily="34" charset="-120"/>
               </a:rPr>
-              <a:t>Your lesson gives Marx's definition as a system of social organisation in which all property is owned by the community, with wealth shared out fairly by a workers' government.</a:t>
+              <a:t>Your lesson defines communism as a way of organising society in which the community owns all the property, and a government of workers shares the wealth out fairly.</a:t>
             </a:r>
             <a:endParaRPr lang="en-US" sz="2400" dirty="0"/>
           </a:p>
@@ -16902,7 +16902,7 @@
                 <a:ea typeface="Calibri" pitchFamily="34" charset="-122"/>
                 <a:cs typeface="Calibri" pitchFamily="34" charset="-120"/>
               </a:rPr>
-              <a:t>Your lesson gives Marx's definition as a system of social organisation in which all property is owned by the…</a:t>
+              <a:t>Your lesson defines communism as a way of organising society in which the community owns all the…</a:t>
             </a:r>
             <a:endParaRPr lang="en-US" sz="1800" dirty="0"/>
           </a:p>
